--- a/ppt/90.C언어-집중과제.pptx
+++ b/ppt/90.C언어-집중과제.pptx
@@ -1,6 +1,6 @@
 
 <file path=ppt/presentation.xml><?xml version="1.0" encoding="utf-8"?>
-<p:presentation xmlns:a="http://schemas.openxmlformats.org/drawingml/2006/main" xmlns:r="http://schemas.openxmlformats.org/officeDocument/2006/relationships" xmlns:p="http://schemas.openxmlformats.org/presentationml/2006/main" saveSubsetFonts="1">
+<p:presentation xmlns:a="http://schemas.openxmlformats.org/drawingml/2006/main" xmlns:r="http://schemas.openxmlformats.org/officeDocument/2006/relationships" xmlns:p="http://schemas.openxmlformats.org/presentationml/2006/main" embedTrueTypeFonts="1" saveSubsetFonts="1">
   <p:sldMasterIdLst>
     <p:sldMasterId id="2147483648" r:id="rId1"/>
   </p:sldMasterIdLst>
@@ -20,6 +20,16 @@
   </p:sldIdLst>
   <p:sldSz cx="9144000" cy="6858000" type="screen4x3"/>
   <p:notesSz cx="6858000" cy="9144000"/>
+  <p:embeddedFontLst>
+    <p:embeddedFont>
+      <p:font typeface="HY견고딕" panose="02030600000101010101" pitchFamily="18" charset="-127"/>
+      <p:regular r:id="rId12"/>
+    </p:embeddedFont>
+    <p:embeddedFont>
+      <p:font typeface="가을체" panose="02030600000101010101" pitchFamily="18" charset="-127"/>
+      <p:regular r:id="rId13"/>
+    </p:embeddedFont>
+  </p:embeddedFontLst>
   <p:defaultTextStyle>
     <a:defPPr>
       <a:defRPr lang="ko-KR"/>

--- a/ppt/90.C언어-집중과제.pptx
+++ b/ppt/90.C언어-집중과제.pptx
@@ -22,12 +22,17 @@
   <p:notesSz cx="6858000" cy="9144000"/>
   <p:embeddedFontLst>
     <p:embeddedFont>
+      <p:font typeface="나눔바른고딕" panose="020B0603020101020101" pitchFamily="50" charset="-127"/>
+      <p:regular r:id="rId12"/>
+      <p:bold r:id="rId13"/>
+    </p:embeddedFont>
+    <p:embeddedFont>
       <p:font typeface="HY견고딕" panose="02030600000101010101" pitchFamily="18" charset="-127"/>
-      <p:regular r:id="rId12"/>
+      <p:regular r:id="rId14"/>
     </p:embeddedFont>
     <p:embeddedFont>
       <p:font typeface="가을체" panose="02030600000101010101" pitchFamily="18" charset="-127"/>
-      <p:regular r:id="rId13"/>
+      <p:regular r:id="rId15"/>
     </p:embeddedFont>
   </p:embeddedFontLst>
   <p:defaultTextStyle>
@@ -1443,9 +1448,11 @@
           <a:bodyPr/>
           <a:lstStyle>
             <a:lvl1pPr>
+              <a:buSzPct val="80000"/>
               <a:defRPr b="1"/>
             </a:lvl1pPr>
             <a:lvl2pPr>
+              <a:buSzPct val="60000"/>
               <a:defRPr b="1"/>
             </a:lvl2pPr>
             <a:lvl3pPr>
@@ -4083,14 +4090,13 @@
           <a:lstStyle/>
           <a:p>
             <a:r>
-              <a:rPr lang="en-US" altLang="ko-KR" b="0" dirty="0"/>
+              <a:rPr lang="en-US" altLang="ko-KR" dirty="0"/>
               <a:t>1</a:t>
             </a:r>
             <a:r>
-              <a:rPr lang="ko-KR" altLang="en-US" b="0" dirty="0"/>
+              <a:rPr lang="ko-KR" altLang="en-US" dirty="0"/>
               <a:t>차 집중 과제</a:t>
             </a:r>
-            <a:endParaRPr lang="ko-KR" altLang="en-US" dirty="0"/>
           </a:p>
         </p:txBody>
       </p:sp>
@@ -4428,14 +4434,13 @@
           <a:lstStyle/>
           <a:p>
             <a:r>
-              <a:rPr lang="en-US" altLang="ko-KR" b="0" dirty="0"/>
+              <a:rPr lang="en-US" altLang="ko-KR" dirty="0"/>
               <a:t>1</a:t>
             </a:r>
             <a:r>
-              <a:rPr lang="ko-KR" altLang="en-US" b="0" dirty="0"/>
+              <a:rPr lang="ko-KR" altLang="en-US" dirty="0"/>
               <a:t>차 집중 과제</a:t>
             </a:r>
-            <a:endParaRPr lang="ko-KR" altLang="en-US" dirty="0"/>
           </a:p>
         </p:txBody>
       </p:sp>
@@ -4702,14 +4707,13 @@
           <a:lstStyle/>
           <a:p>
             <a:r>
-              <a:rPr lang="en-US" altLang="ko-KR" b="0" dirty="0"/>
+              <a:rPr lang="en-US" altLang="ko-KR" dirty="0"/>
               <a:t>1</a:t>
             </a:r>
             <a:r>
-              <a:rPr lang="ko-KR" altLang="en-US" b="0" dirty="0"/>
+              <a:rPr lang="ko-KR" altLang="en-US" dirty="0"/>
               <a:t>차 집중 과제</a:t>
             </a:r>
-            <a:endParaRPr lang="ko-KR" altLang="en-US" dirty="0"/>
           </a:p>
         </p:txBody>
       </p:sp>
@@ -5269,14 +5273,13 @@
           <a:lstStyle/>
           <a:p>
             <a:r>
-              <a:rPr lang="en-US" altLang="ko-KR" b="0" dirty="0"/>
+              <a:rPr lang="en-US" altLang="ko-KR" dirty="0"/>
               <a:t>2</a:t>
             </a:r>
             <a:r>
-              <a:rPr lang="ko-KR" altLang="en-US" b="0" dirty="0"/>
+              <a:rPr lang="ko-KR" altLang="en-US" dirty="0"/>
               <a:t>차 집중 과제</a:t>
             </a:r>
-            <a:endParaRPr lang="ko-KR" altLang="en-US" dirty="0"/>
           </a:p>
         </p:txBody>
       </p:sp>
@@ -5638,14 +5641,13 @@
           <a:lstStyle/>
           <a:p>
             <a:r>
-              <a:rPr lang="en-US" altLang="ko-KR" b="0" dirty="0"/>
+              <a:rPr lang="en-US" altLang="ko-KR" dirty="0"/>
               <a:t>2</a:t>
             </a:r>
             <a:r>
-              <a:rPr lang="ko-KR" altLang="en-US" b="0" dirty="0"/>
+              <a:rPr lang="ko-KR" altLang="en-US" dirty="0"/>
               <a:t>차 집중 과제</a:t>
             </a:r>
-            <a:endParaRPr lang="ko-KR" altLang="en-US" dirty="0"/>
           </a:p>
         </p:txBody>
       </p:sp>
@@ -6065,14 +6067,13 @@
           <a:lstStyle/>
           <a:p>
             <a:r>
-              <a:rPr lang="en-US" altLang="ko-KR" b="0" dirty="0"/>
+              <a:rPr lang="en-US" altLang="ko-KR" dirty="0"/>
               <a:t>2</a:t>
             </a:r>
             <a:r>
-              <a:rPr lang="ko-KR" altLang="en-US" b="0" dirty="0"/>
+              <a:rPr lang="ko-KR" altLang="en-US" dirty="0"/>
               <a:t>차 집중 과제</a:t>
             </a:r>
-            <a:endParaRPr lang="ko-KR" altLang="en-US" dirty="0"/>
           </a:p>
         </p:txBody>
       </p:sp>
@@ -6500,15 +6501,15 @@
         <a:srgbClr val="B2B2B2"/>
       </a:folHlink>
     </a:clrScheme>
-    <a:fontScheme name="기본 디자인">
+    <a:fontScheme name="바른고딕">
       <a:majorFont>
-        <a:latin typeface="가을체"/>
-        <a:ea typeface="가을체"/>
+        <a:latin typeface="나눔바른고딕"/>
+        <a:ea typeface="나눔바른고딕"/>
         <a:cs typeface=""/>
       </a:majorFont>
       <a:minorFont>
-        <a:latin typeface="가을체"/>
-        <a:ea typeface="가을체"/>
+        <a:latin typeface="나눔바른고딕"/>
+        <a:ea typeface="나눔바른고딕"/>
         <a:cs typeface=""/>
       </a:minorFont>
     </a:fontScheme>
